--- a/2.1/5.pptx
+++ b/2.1/5.pptx
@@ -2532,181 +2532,6 @@
           <a:chExt cx="0" cy="0"/>
         </a:xfrm>
       </p:grpSpPr>
-      <p:sp>
-        <p:nvSpPr>
-          <p:cNvPr id="2" name="Text 0"/>
-          <p:cNvSpPr/>
-          <p:nvPr/>
-        </p:nvSpPr>
-        <p:spPr>
-          <a:xfrm>
-            <a:off x="661475" y="629741"/>
-            <a:ext cx="10868745" cy="944959"/>
-          </a:xfrm>
-          <a:prstGeom prst="rect">
-            <a:avLst/>
-          </a:prstGeom>
-          <a:noFill/>
-          <a:ln/>
-        </p:spPr>
-        <p:txBody>
-          <a:bodyPr wrap="square" lIns="0" tIns="0" rIns="0" bIns="0" rtlCol="0" anchor="t">
-            <a:normAutofit/>
-          </a:bodyPr>
-          <a:lstStyle/>
-          <a:p>
-            <a:pPr marL="0" indent="0" algn="l">
-              <a:lnSpc>
-                <a:spcPct val="104000"/>
-              </a:lnSpc>
-              <a:buNone/>
-            </a:pPr>
-            <a:r>
-              <a:rPr lang="en-US" sz="2950" b="1" dirty="0">
-                <a:solidFill>
-                  <a:srgbClr val="000000"/>
-                </a:solidFill>
-                <a:latin typeface="Montserrat Bold" pitchFamily="34" charset="0"/>
-                <a:ea typeface="Montserrat Bold" pitchFamily="34" charset="-122"/>
-                <a:cs typeface="Montserrat Bold" pitchFamily="34" charset="-120"/>
-              </a:rPr>
-              <a:t>Связь скопления дефектов со сложностью бизнес-логики</a:t>
-            </a:r>
-            <a:endParaRPr lang="en-US" sz="2950" dirty="0"/>
-          </a:p>
-        </p:txBody>
-      </p:sp>
-      <p:sp>
-        <p:nvSpPr>
-          <p:cNvPr id="3" name="Text 1"/>
-          <p:cNvSpPr/>
-          <p:nvPr/>
-        </p:nvSpPr>
-        <p:spPr>
-          <a:xfrm>
-            <a:off x="661475" y="3003252"/>
-            <a:ext cx="5249930" cy="236240"/>
-          </a:xfrm>
-          <a:prstGeom prst="rect">
-            <a:avLst/>
-          </a:prstGeom>
-          <a:noFill/>
-          <a:ln/>
-        </p:spPr>
-        <p:txBody>
-          <a:bodyPr wrap="none" lIns="0" tIns="0" rIns="0" bIns="0" rtlCol="0" anchor="t"/>
-          <a:lstStyle/>
-          <a:p>
-            <a:pPr marL="0" indent="0" algn="l">
-              <a:lnSpc>
-                <a:spcPct val="104000"/>
-              </a:lnSpc>
-              <a:buNone/>
-            </a:pPr>
-            <a:r>
-              <a:rPr lang="en-US" sz="1450" b="1" dirty="0">
-                <a:solidFill>
-                  <a:srgbClr val="000000"/>
-                </a:solidFill>
-                <a:latin typeface="Montserrat Bold" pitchFamily="34" charset="0"/>
-                <a:ea typeface="Montserrat Bold" pitchFamily="34" charset="-122"/>
-                <a:cs typeface="Montserrat Bold" pitchFamily="34" charset="-120"/>
-              </a:rPr>
-              <a:t>Система принимает решения</a:t>
-            </a:r>
-            <a:endParaRPr lang="en-US" sz="1450" dirty="0"/>
-          </a:p>
-        </p:txBody>
-      </p:sp>
-      <p:sp>
-        <p:nvSpPr>
-          <p:cNvPr id="4" name="Text 2"/>
-          <p:cNvSpPr/>
-          <p:nvPr/>
-        </p:nvSpPr>
-        <p:spPr>
-          <a:xfrm>
-            <a:off x="661475" y="3360440"/>
-            <a:ext cx="5249930" cy="1632645"/>
-          </a:xfrm>
-          <a:prstGeom prst="rect">
-            <a:avLst/>
-          </a:prstGeom>
-          <a:noFill/>
-          <a:ln/>
-        </p:spPr>
-        <p:txBody>
-          <a:bodyPr wrap="square" lIns="0" tIns="0" rIns="0" bIns="0" rtlCol="0" anchor="t">
-            <a:normAutofit/>
-          </a:bodyPr>
-          <a:lstStyle/>
-          <a:p>
-            <a:pPr marL="0" indent="0" algn="l">
-              <a:lnSpc>
-                <a:spcPct val="120000"/>
-              </a:lnSpc>
-              <a:spcAft>
-                <a:spcPts val="850"/>
-              </a:spcAft>
-              <a:buNone/>
-            </a:pPr>
-            <a:r>
-              <a:rPr lang="en-US" sz="1150" dirty="0">
-                <a:solidFill>
-                  <a:srgbClr val="000000"/>
-                </a:solidFill>
-                <a:latin typeface="Open Sans" pitchFamily="34" charset="0"/>
-                <a:ea typeface="Open Sans" pitchFamily="34" charset="-122"/>
-                <a:cs typeface="Open Sans" pitchFamily="34" charset="-120"/>
-              </a:rPr>
-              <a:t>Концентрация ошибок особенно высока там, где система обрабатывает множество условий и правил одновременно. Система кредитования рассматривает заявку по-разному в зависимости от параметров клиента, продукта, суммы, срока и ограничений.</a:t>
-            </a:r>
-            <a:endParaRPr lang="en-US" sz="1150" dirty="0"/>
-          </a:p>
-          <a:p>
-            <a:pPr marL="0" indent="0" algn="l">
-              <a:lnSpc>
-                <a:spcPct val="120000"/>
-              </a:lnSpc>
-              <a:buNone/>
-            </a:pPr>
-            <a:r>
-              <a:rPr lang="en-US" sz="1150" dirty="0">
-                <a:solidFill>
-                  <a:srgbClr val="000000"/>
-                </a:solidFill>
-                <a:latin typeface="Open Sans" pitchFamily="34" charset="0"/>
-                <a:ea typeface="Open Sans" pitchFamily="34" charset="-122"/>
-                <a:cs typeface="Open Sans" pitchFamily="34" charset="-120"/>
-              </a:rPr>
-              <a:t>Ошибка в одном условии может проявиться только при </a:t>
-            </a:r>
-            <a:r>
-              <a:rPr lang="en-US" sz="1150" b="1" dirty="0">
-                <a:solidFill>
-                  <a:srgbClr val="000000"/>
-                </a:solidFill>
-                <a:latin typeface="Open Sans Bold" pitchFamily="34" charset="0"/>
-                <a:ea typeface="Open Sans Bold" pitchFamily="34" charset="-122"/>
-                <a:cs typeface="Open Sans Bold" pitchFamily="34" charset="-120"/>
-              </a:rPr>
-              <a:t>определённом сочетании данных</a:t>
-            </a:r>
-            <a:r>
-              <a:rPr lang="en-US" sz="1150" dirty="0">
-                <a:solidFill>
-                  <a:srgbClr val="000000"/>
-                </a:solidFill>
-                <a:latin typeface="Open Sans" pitchFamily="34" charset="0"/>
-                <a:ea typeface="Open Sans" pitchFamily="34" charset="-122"/>
-                <a:cs typeface="Open Sans" pitchFamily="34" charset="-120"/>
-              </a:rPr>
-              <a:t>. Такие области требуют глубокого анализа даже при работающем базовом сценарии.</a:t>
-            </a:r>
-            <a:endParaRPr lang="en-US" sz="1150" dirty="0"/>
-          </a:p>
-        </p:txBody>
-      </p:sp>
       <p:pic>
         <p:nvPicPr>
           <p:cNvPr id="5" name="Image 0" descr="preencoded.png"/>
@@ -2723,14 +2548,189 @@
         </p:blipFill>
         <p:spPr>
           <a:xfrm>
-            <a:off x="6811594" y="1892102"/>
-            <a:ext cx="4199924" cy="4200029"/>
+            <a:off x="5529256" y="580578"/>
+            <a:ext cx="6779528" cy="6779697"/>
           </a:xfrm>
           <a:prstGeom prst="rect">
             <a:avLst/>
           </a:prstGeom>
         </p:spPr>
       </p:pic>
+      <p:sp>
+        <p:nvSpPr>
+          <p:cNvPr id="2" name="Text 0"/>
+          <p:cNvSpPr/>
+          <p:nvPr/>
+        </p:nvSpPr>
+        <p:spPr>
+          <a:xfrm>
+            <a:off x="661475" y="629741"/>
+            <a:ext cx="10868745" cy="944959"/>
+          </a:xfrm>
+          <a:prstGeom prst="rect">
+            <a:avLst/>
+          </a:prstGeom>
+          <a:noFill/>
+          <a:ln/>
+        </p:spPr>
+        <p:txBody>
+          <a:bodyPr wrap="square" lIns="0" tIns="0" rIns="0" bIns="0" rtlCol="0" anchor="t">
+            <a:normAutofit/>
+          </a:bodyPr>
+          <a:lstStyle/>
+          <a:p>
+            <a:pPr marL="0" indent="0" algn="l">
+              <a:lnSpc>
+                <a:spcPct val="104000"/>
+              </a:lnSpc>
+              <a:buNone/>
+            </a:pPr>
+            <a:r>
+              <a:rPr lang="en-US" sz="2950" b="1" dirty="0">
+                <a:solidFill>
+                  <a:srgbClr val="000000"/>
+                </a:solidFill>
+                <a:latin typeface="Montserrat Bold" pitchFamily="34" charset="0"/>
+                <a:ea typeface="Montserrat Bold" pitchFamily="34" charset="-122"/>
+                <a:cs typeface="Montserrat Bold" pitchFamily="34" charset="-120"/>
+              </a:rPr>
+              <a:t>Связь скопления дефектов со сложностью бизнес-логики</a:t>
+            </a:r>
+            <a:endParaRPr lang="en-US" sz="2950" dirty="0"/>
+          </a:p>
+        </p:txBody>
+      </p:sp>
+      <p:sp>
+        <p:nvSpPr>
+          <p:cNvPr id="3" name="Text 1"/>
+          <p:cNvSpPr/>
+          <p:nvPr/>
+        </p:nvSpPr>
+        <p:spPr>
+          <a:xfrm>
+            <a:off x="661475" y="3003252"/>
+            <a:ext cx="5249930" cy="236240"/>
+          </a:xfrm>
+          <a:prstGeom prst="rect">
+            <a:avLst/>
+          </a:prstGeom>
+          <a:noFill/>
+          <a:ln/>
+        </p:spPr>
+        <p:txBody>
+          <a:bodyPr wrap="none" lIns="0" tIns="0" rIns="0" bIns="0" rtlCol="0" anchor="t"/>
+          <a:lstStyle/>
+          <a:p>
+            <a:pPr marL="0" indent="0" algn="l">
+              <a:lnSpc>
+                <a:spcPct val="104000"/>
+              </a:lnSpc>
+              <a:buNone/>
+            </a:pPr>
+            <a:r>
+              <a:rPr lang="en-US" sz="1450" b="1" dirty="0">
+                <a:solidFill>
+                  <a:srgbClr val="000000"/>
+                </a:solidFill>
+                <a:latin typeface="Montserrat Bold" pitchFamily="34" charset="0"/>
+                <a:ea typeface="Montserrat Bold" pitchFamily="34" charset="-122"/>
+                <a:cs typeface="Montserrat Bold" pitchFamily="34" charset="-120"/>
+              </a:rPr>
+              <a:t>Система принимает решения</a:t>
+            </a:r>
+            <a:endParaRPr lang="en-US" sz="1450" dirty="0"/>
+          </a:p>
+        </p:txBody>
+      </p:sp>
+      <p:sp>
+        <p:nvSpPr>
+          <p:cNvPr id="4" name="Text 2"/>
+          <p:cNvSpPr/>
+          <p:nvPr/>
+        </p:nvSpPr>
+        <p:spPr>
+          <a:xfrm>
+            <a:off x="661475" y="3360440"/>
+            <a:ext cx="5249930" cy="1632645"/>
+          </a:xfrm>
+          <a:prstGeom prst="rect">
+            <a:avLst/>
+          </a:prstGeom>
+          <a:noFill/>
+          <a:ln/>
+        </p:spPr>
+        <p:txBody>
+          <a:bodyPr wrap="square" lIns="0" tIns="0" rIns="0" bIns="0" rtlCol="0" anchor="t">
+            <a:normAutofit/>
+          </a:bodyPr>
+          <a:lstStyle/>
+          <a:p>
+            <a:pPr marL="0" indent="0" algn="l">
+              <a:lnSpc>
+                <a:spcPct val="120000"/>
+              </a:lnSpc>
+              <a:spcAft>
+                <a:spcPts val="850"/>
+              </a:spcAft>
+              <a:buNone/>
+            </a:pPr>
+            <a:r>
+              <a:rPr lang="en-US" sz="1150" dirty="0">
+                <a:solidFill>
+                  <a:srgbClr val="000000"/>
+                </a:solidFill>
+                <a:latin typeface="Open Sans" pitchFamily="34" charset="0"/>
+                <a:ea typeface="Open Sans" pitchFamily="34" charset="-122"/>
+                <a:cs typeface="Open Sans" pitchFamily="34" charset="-120"/>
+              </a:rPr>
+              <a:t>Концентрация ошибок особенно высока там, где система обрабатывает множество условий и правил одновременно. Система кредитования рассматривает заявку по-разному в зависимости от параметров клиента, продукта, суммы, срока и ограничений.</a:t>
+            </a:r>
+            <a:endParaRPr lang="en-US" sz="1150" dirty="0"/>
+          </a:p>
+          <a:p>
+            <a:pPr marL="0" indent="0" algn="l">
+              <a:lnSpc>
+                <a:spcPct val="120000"/>
+              </a:lnSpc>
+              <a:buNone/>
+            </a:pPr>
+            <a:r>
+              <a:rPr lang="en-US" sz="1150" dirty="0">
+                <a:solidFill>
+                  <a:srgbClr val="000000"/>
+                </a:solidFill>
+                <a:latin typeface="Open Sans" pitchFamily="34" charset="0"/>
+                <a:ea typeface="Open Sans" pitchFamily="34" charset="-122"/>
+                <a:cs typeface="Open Sans" pitchFamily="34" charset="-120"/>
+              </a:rPr>
+              <a:t>Ошибка в одном условии может проявиться только при </a:t>
+            </a:r>
+            <a:r>
+              <a:rPr lang="en-US" sz="1150" b="1" dirty="0">
+                <a:solidFill>
+                  <a:srgbClr val="000000"/>
+                </a:solidFill>
+                <a:latin typeface="Open Sans Bold" pitchFamily="34" charset="0"/>
+                <a:ea typeface="Open Sans Bold" pitchFamily="34" charset="-122"/>
+                <a:cs typeface="Open Sans Bold" pitchFamily="34" charset="-120"/>
+              </a:rPr>
+              <a:t>определённом сочетании данных</a:t>
+            </a:r>
+            <a:r>
+              <a:rPr lang="en-US" sz="1150" dirty="0">
+                <a:solidFill>
+                  <a:srgbClr val="000000"/>
+                </a:solidFill>
+                <a:latin typeface="Open Sans" pitchFamily="34" charset="0"/>
+                <a:ea typeface="Open Sans" pitchFamily="34" charset="-122"/>
+                <a:cs typeface="Open Sans" pitchFamily="34" charset="-120"/>
+              </a:rPr>
+              <a:t>. Такие области требуют глубокого анализа даже при работающем базовом сценарии.</a:t>
+            </a:r>
+            <a:endParaRPr lang="en-US" sz="1150" dirty="0"/>
+          </a:p>
+        </p:txBody>
+      </p:sp>
     </p:spTree>
   </p:cSld>
   <p:clrMapOvr>
